--- a/PPTs/Ch12_13_Fixed_Floating_Point_Numbers.pptx
+++ b/PPTs/Ch12_13_Fixed_Floating_Point_Numbers.pptx
@@ -11863,7 +11863,7 @@
           <a:p>
             <a:r>
               <a:rPr lang="en-US" dirty="0"/>
-              <a:t>Fall 2025</a:t>
+              <a:t>Fall 2026</a:t>
             </a:r>
           </a:p>
         </p:txBody>
@@ -11929,7 +11929,7 @@
                   <a:srgbClr val="C00000"/>
                 </a:solidFill>
               </a:rPr>
-              <a:t>Chapter 13</a:t>
+              <a:t>Chapter 12</a:t>
             </a:r>
           </a:p>
           <a:p>
@@ -15323,7 +15323,7 @@
                 <a:latin typeface="Consolas" panose="020B0609020204030204" pitchFamily="49" charset="0"/>
                 <a:cs typeface="Consolas" panose="020B0609020204030204" pitchFamily="49" charset="0"/>
               </a:rPr>
-              <a:t>0x40920000</a:t>
+              <a:t>0x40900000</a:t>
             </a:r>
             <a:br>
               <a:rPr lang="en-US" dirty="0"/>
@@ -21940,7 +21940,7 @@
                 <a:latin typeface="Consolas" panose="020B0609020204030204" pitchFamily="49" charset="0"/>
                 <a:cs typeface="Consolas" panose="020B0609020204030204" pitchFamily="49" charset="0"/>
               </a:rPr>
-              <a:t>111111111</a:t>
+              <a:t>11111111</a:t>
             </a:r>
             <a:r>
               <a:rPr lang="en-US" dirty="0"/>
@@ -31103,7 +31103,7 @@
                   <a:srgbClr val="C00000"/>
                 </a:solidFill>
               </a:rPr>
-              <a:t>U5.3</a:t>
+              <a:t>UQ5.3</a:t>
             </a:r>
             <a:r>
               <a:rPr lang="en-US" dirty="0">
@@ -32713,7 +32713,7 @@
                   <a:srgbClr val="C00000"/>
                 </a:solidFill>
               </a:rPr>
-              <a:t>Um.n</a:t>
+              <a:t>UQm.n</a:t>
             </a:r>
             <a:endParaRPr lang="en-US" dirty="0"/>
           </a:p>
@@ -34989,25 +34989,25 @@
                       <a:rPr lang="en-US" sz="2000" i="1">
                         <a:latin typeface="Cambria Math" panose="02040503050406030204" pitchFamily="18" charset="0"/>
                       </a:rPr>
-                      <m:t>=</m:t>
+                      <m:t>=−8.5625</m:t>
                     </m:r>
                     <m:r>
                       <a:rPr lang="en-US" sz="2000" i="1">
                         <a:latin typeface="Cambria Math" panose="02040503050406030204" pitchFamily="18" charset="0"/>
                       </a:rPr>
-                      <m:t>8</m:t>
+                      <m:t/>
                     </m:r>
                     <m:r>
                       <a:rPr lang="en-US" sz="2000" i="1">
                         <a:latin typeface="Cambria Math" panose="02040503050406030204" pitchFamily="18" charset="0"/>
                       </a:rPr>
-                      <m:t>.</m:t>
+                      <m:t/>
                     </m:r>
                     <m:r>
                       <a:rPr lang="en-US" sz="2000" i="1">
                         <a:latin typeface="Cambria Math" panose="02040503050406030204" pitchFamily="18" charset="0"/>
                       </a:rPr>
-                      <m:t>5625</m:t>
+                      <m:t/>
                     </m:r>
                     <m:r>
                       <a:rPr lang="en-US" sz="2000" i="1">
